--- a/Doc/Review-0[1] (1).pptx
+++ b/Doc/Review-0[1] (1).pptx
@@ -307,7 +307,7 @@
       </p15:sldGuideLst>
     </p:ext>
     <p:ext uri="GoogleSlidesCustomDataVersion2">
-      <go:slidesCustomData xmlns:go="http://customooxmlschemas.google.com/" xmlns:ahyp="http://schemas.microsoft.com/office/drawing/2018/hyperlinkcolor" xmlns:p15="http://schemas.microsoft.com/office/powerpoint/2012/main" xmlns:p14="http://schemas.microsoft.com/office/powerpoint/2010/main" xmlns:com="http://schemas.openxmlformats.org/drawingml/2006/compatibility" xmlns:pvml="urn:schemas-microsoft-com:office:powerpoint" xmlns:v="urn:schemas-microsoft-com:vml" xmlns:o="urn:schemas-microsoft-com:office:office" xmlns:dgm="http://schemas.openxmlformats.org/drawingml/2006/diagram" xmlns:c="http://schemas.openxmlformats.org/drawingml/2006/chart" xmlns:mv="urn:schemas-microsoft-com:mac:vml" xmlns:mc="http://schemas.openxmlformats.org/markup-compatibility/2006" xmlns="" r:id="rId36" roundtripDataSignature="AMtx7mgQmHZMLQPRrBnjCO/7tdUMXWBY/g=="/>
+      <go:slidesCustomData xmlns="" xmlns:mc="http://schemas.openxmlformats.org/markup-compatibility/2006" xmlns:mv="urn:schemas-microsoft-com:mac:vml" xmlns:c="http://schemas.openxmlformats.org/drawingml/2006/chart" xmlns:dgm="http://schemas.openxmlformats.org/drawingml/2006/diagram" xmlns:o="urn:schemas-microsoft-com:office:office" xmlns:v="urn:schemas-microsoft-com:vml" xmlns:pvml="urn:schemas-microsoft-com:office:powerpoint" xmlns:com="http://schemas.openxmlformats.org/drawingml/2006/compatibility" xmlns:p14="http://schemas.microsoft.com/office/powerpoint/2010/main" xmlns:p15="http://schemas.microsoft.com/office/powerpoint/2012/main" xmlns:ahyp="http://schemas.microsoft.com/office/drawing/2018/hyperlinkcolor" xmlns:go="http://customooxmlschemas.google.com/" r:id="rId36" roundtripDataSignature="AMtx7mgQmHZMLQPRrBnjCO/7tdUMXWBY/g=="/>
     </p:ext>
   </p:extLst>
 </p:presentation>
@@ -20406,14 +20406,7 @@
                 <a:latin typeface="Times New Roman" panose="02020603050405020304" pitchFamily="18" charset="0"/>
                 <a:cs typeface="Times New Roman" panose="02020603050405020304" pitchFamily="18" charset="0"/>
               </a:rPr>
-              <a:t>URL safety </a:t>
-            </a:r>
-            <a:r>
-              <a:rPr lang="en-US" sz="1800" b="1">
-                <a:latin typeface="Times New Roman" panose="02020603050405020304" pitchFamily="18" charset="0"/>
-                <a:cs typeface="Times New Roman" panose="02020603050405020304" pitchFamily="18" charset="0"/>
-              </a:rPr>
-              <a:t>classification models.</a:t>
+              <a:t>URL safety classification models.</a:t>
             </a:r>
             <a:endParaRPr lang="en-US" sz="1800" dirty="0">
               <a:latin typeface="Times New Roman" panose="02020603050405020304" pitchFamily="18" charset="0"/>
@@ -21487,14 +21480,14 @@
           <p:nvPr>
             <p:extLst>
               <p:ext uri="{D42A27DB-BD31-4B8C-83A1-F6EECF244321}">
-                <p14:modId xmlns:p14="http://schemas.microsoft.com/office/powerpoint/2010/main" val="3044824219"/>
+                <p14:modId xmlns:p14="http://schemas.microsoft.com/office/powerpoint/2010/main" val="1871722418"/>
               </p:ext>
             </p:extLst>
           </p:nvPr>
         </p:nvGraphicFramePr>
         <p:xfrm>
           <a:off x="466344" y="1499616"/>
-          <a:ext cx="7620000" cy="3851176"/>
+          <a:ext cx="7620000" cy="3840300"/>
         </p:xfrm>
         <a:graphic>
           <a:graphicData uri="http://schemas.openxmlformats.org/drawingml/2006/table">
@@ -21698,7 +21691,7 @@
                   </a:ext>
                 </a:extLst>
               </a:tr>
-              <a:tr h="481397">
+              <a:tr h="470521">
                 <a:tc>
                   <a:txBody>
                     <a:bodyPr/>
